--- a/7. Data Parallelism/DataParallelism.pptx
+++ b/7. Data Parallelism/DataParallelism.pptx
@@ -1426,7 +1426,7 @@
           <a:lstStyle/>
           <a:p>
             <a:r>
-              <a:t>Your turn. Open the starter, run it, and click Run import before you change anything, so you have your own baseline rather than mine. Everything you need to change is in ImportService.cs, in RunImportAsync, and the three ToDo Refactor comments mark the spots. Stage one is pure CPU work with no shared state, so it wants every core. Stage two is I/O, currently async void, and it wants the overload that can await your body plus a sensible ceiling on how many calls you make at once. Stage three is a LINQ query that can become a PLINQ query. Do not change the other services, the model, or the page. When you are done, the Validated and Enriched cards should both read 4,000 of 4,000, and the total should be lower than your baseline even though the app is finally doing the work it used to skip.</a:t>
+              <a:t>Your turn. Open the starter, run it, and click Run import before you change anything, so you have your own baseline rather than mine. The workshop guide docked beside the Import page walks you through the challenge one step at a time, and it re-checks your code every time the app starts. Everything you need to change is in ImportService.cs, in RunImportAsync, and the five ToDo Refactor comments mark the spots, each tagged with the step that checks it. Stage one is pure CPU work with no shared state, so it wants every core. Stage two is I/O, currently async void, and it wants the overload that can await your body plus a sensible ceiling on how many calls you make at once. Stage three is a LINQ query that can become a PLINQ query, and Step 3 also cancels an import to make sure every stage honors the token RunImportAsync already receives. Do not change the other services, the model, or the page. When you are done, the guide should show 3 of 3 steps pass, the Validated and Enriched cards should both read 4,000 of 4,000, and the total should be at or below your baseline even though the app is finally doing the work it used to skip.</a:t>
             </a:r>
           </a:p>
         </p:txBody>
@@ -9105,7 +9105,7 @@
           <a:p>
             <a:r>
               <a:rPr lang="en-US" dirty="0"/>
-              <a:t>Three `// ToDo Refactor` comments in `ImportService.cs`</a:t>
+              <a:t>Five `// ToDo Refactor (Step N)` comments in `ImportService.cs`</a:t>
             </a:r>
           </a:p>
           <a:p>
@@ -9129,13 +9129,13 @@
           <a:p>
             <a:r>
               <a:rPr lang="en-US" dirty="0"/>
-              <a:t>Summarize with PLINQ</a:t>
+              <a:t>Summarize with PLINQ, and stop when cancelled</a:t>
             </a:r>
           </a:p>
           <a:p>
             <a:r>
               <a:rPr lang="en-US" dirty="0"/>
-              <a:t>Both cards green, total time down</a:t>
+              <a:t>3 of 3 steps pass, both cards green, total time down</a:t>
             </a:r>
           </a:p>
         </p:txBody>
@@ -9787,7 +9787,7 @@
             </a:r>
             <a:r>
               <a:rPr lang="en-US" sz="2400" dirty="0"/>
-              <a:t>`: `-1` means `Environment.ProcessorCount`</a:t>
+              <a:t>: `-1` means `Environment.ProcessorCount`</a:t>
             </a:r>
           </a:p>
         </p:txBody>
